--- a/public/fun/pack/pptx/family/가족소개_06_우리부부_봄비창가.pptx
+++ b/public/fun/pack/pptx/family/가족소개_06_우리부부_봄비창가.pptx
@@ -3347,7 +3347,7 @@
             <a:r>
               <a:rPr sz="3600" b="1" i="0">
                 <a:solidFill>
-                  <a:srgbClr val="29465B"/>
+                  <a:srgbClr val="224E6D"/>
                 </a:solidFill>
               </a:rPr>
               <a:t>우리 가족을 소개합니다</a:t>
@@ -3385,7 +3385,7 @@
             <a:r>
               <a:rPr sz="1700" b="0" i="1">
                 <a:solidFill>
-                  <a:srgbClr val="29465B"/>
+                  <a:srgbClr val="224E6D"/>
                 </a:solidFill>
               </a:rPr>
               <a:t>봄비 오는 창가에서 차 한 잔</a:t>
@@ -3445,7 +3445,7 @@
     <p:bg>
       <p:bgPr>
         <a:solidFill>
-          <a:srgbClr val="F1F5F9"/>
+          <a:srgbClr val="F3F8FC"/>
         </a:solidFill>
         <a:effectLst/>
       </p:bgPr>
@@ -3472,7 +3472,7 @@
             <a:avLst/>
           </a:prstGeom>
           <a:solidFill>
-            <a:srgbClr val="497DA2"/>
+            <a:srgbClr val="5196C8"/>
           </a:solidFill>
           <a:ln>
             <a:noFill/>
@@ -3501,7 +3501,7 @@
             <a:avLst/>
           </a:prstGeom>
           <a:solidFill>
-            <a:srgbClr val="8D3F46"/>
+            <a:srgbClr val="339941"/>
           </a:solidFill>
           <a:ln>
             <a:noFill/>
@@ -3545,7 +3545,7 @@
             <a:r>
               <a:rPr sz="3000" b="1" i="0">
                 <a:solidFill>
-                  <a:srgbClr val="29465B"/>
+                  <a:srgbClr val="224E6D"/>
                 </a:solidFill>
               </a:rPr>
               <a:t>가족 구성원</a:t>
@@ -3568,11 +3568,11 @@
             <a:avLst/>
           </a:prstGeom>
           <a:solidFill>
-            <a:srgbClr val="D3E3EE"/>
+            <a:srgbClr val="D4E8F7"/>
           </a:solidFill>
           <a:ln w="19050">
             <a:solidFill>
-              <a:srgbClr val="497DA2"/>
+              <a:srgbClr val="5196C8"/>
             </a:solidFill>
             <a:prstDash val="dash"/>
           </a:ln>
@@ -3591,7 +3591,7 @@
             <a:r>
               <a:rPr sz="1200" b="0" i="0">
                 <a:solidFill>
-                  <a:srgbClr val="29465B"/>
+                  <a:srgbClr val="224E6D"/>
                 </a:solidFill>
               </a:rPr>
               <a:t>사진</a:t>
@@ -3629,7 +3629,7 @@
             <a:r>
               <a:rPr sz="1600" b="1" i="0">
                 <a:solidFill>
-                  <a:srgbClr val="29465B"/>
+                  <a:srgbClr val="224E6D"/>
                 </a:solidFill>
               </a:rPr>
               <a:t>남편</a:t>
@@ -3720,11 +3720,11 @@
             <a:avLst/>
           </a:prstGeom>
           <a:solidFill>
-            <a:srgbClr val="D3E3EE"/>
+            <a:srgbClr val="D4E8F7"/>
           </a:solidFill>
           <a:ln w="19050">
             <a:solidFill>
-              <a:srgbClr val="497DA2"/>
+              <a:srgbClr val="5196C8"/>
             </a:solidFill>
             <a:prstDash val="dash"/>
           </a:ln>
@@ -3743,7 +3743,7 @@
             <a:r>
               <a:rPr sz="1200" b="0" i="0">
                 <a:solidFill>
-                  <a:srgbClr val="29465B"/>
+                  <a:srgbClr val="224E6D"/>
                 </a:solidFill>
               </a:rPr>
               <a:t>사진</a:t>
@@ -3781,7 +3781,7 @@
             <a:r>
               <a:rPr sz="1600" b="1" i="0">
                 <a:solidFill>
-                  <a:srgbClr val="29465B"/>
+                  <a:srgbClr val="224E6D"/>
                 </a:solidFill>
               </a:rPr>
               <a:t>아내</a:t>
@@ -3871,7 +3871,7 @@
     <p:bg>
       <p:bgPr>
         <a:solidFill>
-          <a:srgbClr val="F1F5F9"/>
+          <a:srgbClr val="F3F8FC"/>
         </a:solidFill>
         <a:effectLst/>
       </p:bgPr>
@@ -3898,7 +3898,7 @@
             <a:avLst/>
           </a:prstGeom>
           <a:solidFill>
-            <a:srgbClr val="497DA2"/>
+            <a:srgbClr val="5196C8"/>
           </a:solidFill>
           <a:ln>
             <a:noFill/>
@@ -3927,7 +3927,7 @@
             <a:avLst/>
           </a:prstGeom>
           <a:solidFill>
-            <a:srgbClr val="8D3F46"/>
+            <a:srgbClr val="339941"/>
           </a:solidFill>
           <a:ln>
             <a:noFill/>
@@ -3971,7 +3971,7 @@
             <a:r>
               <a:rPr sz="3000" b="1" i="0">
                 <a:solidFill>
-                  <a:srgbClr val="29465B"/>
+                  <a:srgbClr val="224E6D"/>
                 </a:solidFill>
               </a:rPr>
               <a:t>우리 가족 이야기</a:t>
@@ -3994,7 +3994,7 @@
             <a:avLst/>
           </a:prstGeom>
           <a:solidFill>
-            <a:srgbClr val="D3E3EE"/>
+            <a:srgbClr val="D4E8F7"/>
           </a:solidFill>
           <a:ln>
             <a:noFill/>
@@ -4023,7 +4023,7 @@
             <a:avLst/>
           </a:prstGeom>
           <a:solidFill>
-            <a:srgbClr val="497DA2"/>
+            <a:srgbClr val="5196C8"/>
           </a:solidFill>
           <a:ln w="38100">
             <a:solidFill>
@@ -4069,7 +4069,7 @@
             <a:r>
               <a:rPr sz="1600" b="1" i="0">
                 <a:solidFill>
-                  <a:srgbClr val="497DA2"/>
+                  <a:srgbClr val="5196C8"/>
                 </a:solidFill>
               </a:rPr>
               <a:t>처음 만난 날</a:t>
@@ -4107,7 +4107,7 @@
             <a:r>
               <a:rPr sz="1800" b="1" i="0">
                 <a:solidFill>
-                  <a:srgbClr val="29465B"/>
+                  <a:srgbClr val="224E6D"/>
                 </a:solidFill>
               </a:rPr>
               <a:t>첫 만남</a:t>
@@ -4168,7 +4168,7 @@
             <a:avLst/>
           </a:prstGeom>
           <a:solidFill>
-            <a:srgbClr val="497DA2"/>
+            <a:srgbClr val="5196C8"/>
           </a:solidFill>
           <a:ln w="38100">
             <a:solidFill>
@@ -4214,7 +4214,7 @@
             <a:r>
               <a:rPr sz="1600" b="1" i="0">
                 <a:solidFill>
-                  <a:srgbClr val="497DA2"/>
+                  <a:srgbClr val="5196C8"/>
                 </a:solidFill>
               </a:rPr>
               <a:t>결혼</a:t>
@@ -4252,7 +4252,7 @@
             <a:r>
               <a:rPr sz="1800" b="1" i="0">
                 <a:solidFill>
-                  <a:srgbClr val="29465B"/>
+                  <a:srgbClr val="224E6D"/>
                 </a:solidFill>
               </a:rPr>
               <a:t>함께 시작한 날</a:t>
@@ -4313,7 +4313,7 @@
             <a:avLst/>
           </a:prstGeom>
           <a:solidFill>
-            <a:srgbClr val="497DA2"/>
+            <a:srgbClr val="5196C8"/>
           </a:solidFill>
           <a:ln w="38100">
             <a:solidFill>
@@ -4359,7 +4359,7 @@
             <a:r>
               <a:rPr sz="1600" b="1" i="0">
                 <a:solidFill>
-                  <a:srgbClr val="497DA2"/>
+                  <a:srgbClr val="5196C8"/>
                 </a:solidFill>
               </a:rPr>
               <a:t>첫 집</a:t>
@@ -4397,7 +4397,7 @@
             <a:r>
               <a:rPr sz="1800" b="1" i="0">
                 <a:solidFill>
-                  <a:srgbClr val="29465B"/>
+                  <a:srgbClr val="224E6D"/>
                 </a:solidFill>
               </a:rPr>
               <a:t>우리의 보금자리</a:t>
@@ -4458,7 +4458,7 @@
             <a:avLst/>
           </a:prstGeom>
           <a:solidFill>
-            <a:srgbClr val="497DA2"/>
+            <a:srgbClr val="5196C8"/>
           </a:solidFill>
           <a:ln w="38100">
             <a:solidFill>
@@ -4504,7 +4504,7 @@
             <a:r>
               <a:rPr sz="1600" b="1" i="0">
                 <a:solidFill>
-                  <a:srgbClr val="497DA2"/>
+                  <a:srgbClr val="5196C8"/>
                 </a:solidFill>
               </a:rPr>
               <a:t>지금</a:t>
@@ -4542,7 +4542,7 @@
             <a:r>
               <a:rPr sz="1800" b="1" i="0">
                 <a:solidFill>
-                  <a:srgbClr val="29465B"/>
+                  <a:srgbClr val="224E6D"/>
                 </a:solidFill>
               </a:rPr>
               <a:t>오늘의 우리</a:t>
@@ -4602,7 +4602,7 @@
     <p:bg>
       <p:bgPr>
         <a:solidFill>
-          <a:srgbClr val="F1F5F9"/>
+          <a:srgbClr val="F3F8FC"/>
         </a:solidFill>
         <a:effectLst/>
       </p:bgPr>
@@ -4629,7 +4629,7 @@
             <a:avLst/>
           </a:prstGeom>
           <a:solidFill>
-            <a:srgbClr val="497DA2"/>
+            <a:srgbClr val="5196C8"/>
           </a:solidFill>
           <a:ln>
             <a:noFill/>
@@ -4658,7 +4658,7 @@
             <a:avLst/>
           </a:prstGeom>
           <a:solidFill>
-            <a:srgbClr val="8D3F46"/>
+            <a:srgbClr val="339941"/>
           </a:solidFill>
           <a:ln>
             <a:noFill/>
@@ -4702,7 +4702,7 @@
             <a:r>
               <a:rPr sz="3000" b="1" i="0">
                 <a:solidFill>
-                  <a:srgbClr val="29465B"/>
+                  <a:srgbClr val="224E6D"/>
                 </a:solidFill>
               </a:rPr>
               <a:t>우리 가족의 약속</a:t>
@@ -4727,11 +4727,11 @@
             </a:avLst>
           </a:prstGeom>
           <a:solidFill>
-            <a:srgbClr val="F1F5F9"/>
+            <a:srgbClr val="F3F8FC"/>
           </a:solidFill>
           <a:ln w="12700">
             <a:solidFill>
-              <a:srgbClr val="D3E3EE"/>
+              <a:srgbClr val="D4E8F7"/>
             </a:solidFill>
           </a:ln>
         </p:spPr>
@@ -4758,7 +4758,7 @@
             <a:avLst/>
           </a:prstGeom>
           <a:solidFill>
-            <a:srgbClr val="497DA2"/>
+            <a:srgbClr val="5196C8"/>
           </a:solidFill>
           <a:ln>
             <a:noFill/>
@@ -4816,7 +4816,7 @@
             <a:r>
               <a:rPr sz="1800" b="1" i="0">
                 <a:solidFill>
-                  <a:srgbClr val="29465B"/>
+                  <a:srgbClr val="224E6D"/>
                 </a:solidFill>
               </a:rPr>
               <a:t>약속 1</a:t>
@@ -4879,11 +4879,11 @@
             </a:avLst>
           </a:prstGeom>
           <a:solidFill>
-            <a:srgbClr val="F1F5F9"/>
+            <a:srgbClr val="F3F8FC"/>
           </a:solidFill>
           <a:ln w="12700">
             <a:solidFill>
-              <a:srgbClr val="D3E3EE"/>
+              <a:srgbClr val="D4E8F7"/>
             </a:solidFill>
           </a:ln>
         </p:spPr>
@@ -4910,7 +4910,7 @@
             <a:avLst/>
           </a:prstGeom>
           <a:solidFill>
-            <a:srgbClr val="497DA2"/>
+            <a:srgbClr val="5196C8"/>
           </a:solidFill>
           <a:ln>
             <a:noFill/>
@@ -4968,7 +4968,7 @@
             <a:r>
               <a:rPr sz="1800" b="1" i="0">
                 <a:solidFill>
-                  <a:srgbClr val="29465B"/>
+                  <a:srgbClr val="224E6D"/>
                 </a:solidFill>
               </a:rPr>
               <a:t>약속 2</a:t>
@@ -5031,11 +5031,11 @@
             </a:avLst>
           </a:prstGeom>
           <a:solidFill>
-            <a:srgbClr val="F1F5F9"/>
+            <a:srgbClr val="F3F8FC"/>
           </a:solidFill>
           <a:ln w="12700">
             <a:solidFill>
-              <a:srgbClr val="D3E3EE"/>
+              <a:srgbClr val="D4E8F7"/>
             </a:solidFill>
           </a:ln>
         </p:spPr>
@@ -5062,7 +5062,7 @@
             <a:avLst/>
           </a:prstGeom>
           <a:solidFill>
-            <a:srgbClr val="497DA2"/>
+            <a:srgbClr val="5196C8"/>
           </a:solidFill>
           <a:ln>
             <a:noFill/>
@@ -5120,7 +5120,7 @@
             <a:r>
               <a:rPr sz="1800" b="1" i="0">
                 <a:solidFill>
-                  <a:srgbClr val="29465B"/>
+                  <a:srgbClr val="224E6D"/>
                 </a:solidFill>
               </a:rPr>
               <a:t>약속 3</a:t>
@@ -5180,7 +5180,7 @@
     <p:bg>
       <p:bgPr>
         <a:solidFill>
-          <a:srgbClr val="F1F5F9"/>
+          <a:srgbClr val="F3F8FC"/>
         </a:solidFill>
         <a:effectLst/>
       </p:bgPr>
@@ -5207,7 +5207,7 @@
             <a:avLst/>
           </a:prstGeom>
           <a:solidFill>
-            <a:srgbClr val="497DA2"/>
+            <a:srgbClr val="5196C8"/>
           </a:solidFill>
           <a:ln>
             <a:noFill/>
@@ -5236,7 +5236,7 @@
             <a:avLst/>
           </a:prstGeom>
           <a:solidFill>
-            <a:srgbClr val="8D3F46"/>
+            <a:srgbClr val="339941"/>
           </a:solidFill>
           <a:ln>
             <a:noFill/>
@@ -5280,7 +5280,7 @@
             <a:r>
               <a:rPr sz="3000" b="1" i="0">
                 <a:solidFill>
-                  <a:srgbClr val="29465B"/>
+                  <a:srgbClr val="224E6D"/>
                 </a:solidFill>
               </a:rPr>
               <a:t>가족 사진</a:t>
@@ -5305,11 +5305,11 @@
             </a:avLst>
           </a:prstGeom>
           <a:solidFill>
-            <a:srgbClr val="D3E3EE"/>
+            <a:srgbClr val="D4E8F7"/>
           </a:solidFill>
           <a:ln w="19050">
             <a:solidFill>
-              <a:srgbClr val="497DA2"/>
+              <a:srgbClr val="5196C8"/>
             </a:solidFill>
             <a:prstDash val="dash"/>
           </a:ln>
@@ -5328,7 +5328,7 @@
             <a:r>
               <a:rPr sz="1200" b="0" i="0">
                 <a:solidFill>
-                  <a:srgbClr val="29465B"/>
+                  <a:srgbClr val="224E6D"/>
                 </a:solidFill>
               </a:rPr>
               <a:t>사진 1</a:t>
@@ -5353,11 +5353,11 @@
             </a:avLst>
           </a:prstGeom>
           <a:solidFill>
-            <a:srgbClr val="D3E3EE"/>
+            <a:srgbClr val="D4E8F7"/>
           </a:solidFill>
           <a:ln w="19050">
             <a:solidFill>
-              <a:srgbClr val="497DA2"/>
+              <a:srgbClr val="5196C8"/>
             </a:solidFill>
             <a:prstDash val="dash"/>
           </a:ln>
@@ -5376,7 +5376,7 @@
             <a:r>
               <a:rPr sz="1200" b="0" i="0">
                 <a:solidFill>
-                  <a:srgbClr val="29465B"/>
+                  <a:srgbClr val="224E6D"/>
                 </a:solidFill>
               </a:rPr>
               <a:t>사진 2</a:t>
@@ -5401,11 +5401,11 @@
             </a:avLst>
           </a:prstGeom>
           <a:solidFill>
-            <a:srgbClr val="D3E3EE"/>
+            <a:srgbClr val="D4E8F7"/>
           </a:solidFill>
           <a:ln w="19050">
             <a:solidFill>
-              <a:srgbClr val="497DA2"/>
+              <a:srgbClr val="5196C8"/>
             </a:solidFill>
             <a:prstDash val="dash"/>
           </a:ln>
@@ -5424,7 +5424,7 @@
             <a:r>
               <a:rPr sz="1200" b="0" i="0">
                 <a:solidFill>
-                  <a:srgbClr val="29465B"/>
+                  <a:srgbClr val="224E6D"/>
                 </a:solidFill>
               </a:rPr>
               <a:t>사진 3</a:t>
@@ -5449,11 +5449,11 @@
             </a:avLst>
           </a:prstGeom>
           <a:solidFill>
-            <a:srgbClr val="D3E3EE"/>
+            <a:srgbClr val="D4E8F7"/>
           </a:solidFill>
           <a:ln w="19050">
             <a:solidFill>
-              <a:srgbClr val="497DA2"/>
+              <a:srgbClr val="5196C8"/>
             </a:solidFill>
             <a:prstDash val="dash"/>
           </a:ln>
@@ -5472,7 +5472,7 @@
             <a:r>
               <a:rPr sz="1200" b="0" i="0">
                 <a:solidFill>
-                  <a:srgbClr val="29465B"/>
+                  <a:srgbClr val="224E6D"/>
                 </a:solidFill>
               </a:rPr>
               <a:t>사진 4</a:t>
@@ -5497,11 +5497,11 @@
             </a:avLst>
           </a:prstGeom>
           <a:solidFill>
-            <a:srgbClr val="D3E3EE"/>
+            <a:srgbClr val="D4E8F7"/>
           </a:solidFill>
           <a:ln w="19050">
             <a:solidFill>
-              <a:srgbClr val="497DA2"/>
+              <a:srgbClr val="5196C8"/>
             </a:solidFill>
             <a:prstDash val="dash"/>
           </a:ln>
@@ -5520,7 +5520,7 @@
             <a:r>
               <a:rPr sz="1200" b="0" i="0">
                 <a:solidFill>
-                  <a:srgbClr val="29465B"/>
+                  <a:srgbClr val="224E6D"/>
                 </a:solidFill>
               </a:rPr>
               <a:t>사진 5</a:t>
@@ -5545,11 +5545,11 @@
             </a:avLst>
           </a:prstGeom>
           <a:solidFill>
-            <a:srgbClr val="D3E3EE"/>
+            <a:srgbClr val="D4E8F7"/>
           </a:solidFill>
           <a:ln w="19050">
             <a:solidFill>
-              <a:srgbClr val="497DA2"/>
+              <a:srgbClr val="5196C8"/>
             </a:solidFill>
             <a:prstDash val="dash"/>
           </a:ln>
@@ -5568,7 +5568,7 @@
             <a:r>
               <a:rPr sz="1200" b="0" i="0">
                 <a:solidFill>
-                  <a:srgbClr val="29465B"/>
+                  <a:srgbClr val="224E6D"/>
                 </a:solidFill>
               </a:rPr>
               <a:t>사진 6</a:t>
@@ -5648,7 +5648,7 @@
             <a:r>
               <a:rPr sz="3600" b="1" i="0">
                 <a:solidFill>
-                  <a:srgbClr val="29465B"/>
+                  <a:srgbClr val="224E6D"/>
                 </a:solidFill>
               </a:rPr>
               <a:t>우리 가족 소개를 마칩니다</a:t>
@@ -5686,7 +5686,7 @@
             <a:r>
               <a:rPr sz="1700" b="0" i="1">
                 <a:solidFill>
-                  <a:srgbClr val="29465B"/>
+                  <a:srgbClr val="224E6D"/>
                 </a:solidFill>
               </a:rPr>
               <a:t>읽어 주셔서 고맙습니다</a:t>
@@ -5751,34 +5751,34 @@
         <a:sysClr val="window" lastClr="FFFFFF"/>
       </a:lt1>
       <a:dk2>
-        <a:srgbClr val="29465B"/>
+        <a:srgbClr val="224E6D"/>
       </a:dk2>
       <a:lt2>
-        <a:srgbClr val="F1F5F9"/>
+        <a:srgbClr val="F3F8FC"/>
       </a:lt2>
       <a:accent1>
-        <a:srgbClr val="497DA2"/>
+        <a:srgbClr val="5196C8"/>
       </a:accent1>
       <a:accent2>
-        <a:srgbClr val="8D3F46"/>
+        <a:srgbClr val="339941"/>
       </a:accent2>
       <a:accent3>
-        <a:srgbClr val="29465B"/>
+        <a:srgbClr val="224E6D"/>
       </a:accent3>
       <a:accent4>
-        <a:srgbClr val="D3E3EE"/>
+        <a:srgbClr val="D4E8F7"/>
       </a:accent4>
       <a:accent5>
-        <a:srgbClr val="6B5E74"/>
+        <a:srgbClr val="429884"/>
       </a:accent5>
       <a:accent6>
-        <a:srgbClr val="7F909D"/>
+        <a:srgbClr val="7A95A7"/>
       </a:accent6>
       <a:hlink>
-        <a:srgbClr val="497DA2"/>
+        <a:srgbClr val="5196C8"/>
       </a:hlink>
       <a:folHlink>
-        <a:srgbClr val="29465B"/>
+        <a:srgbClr val="224E6D"/>
       </a:folHlink>
     </a:clrScheme>
     <a:fontScheme name="Office">
